--- a/docs/presentation/ADK_Code_Reviewer_KT_basic_fonts_with_notes.pptx
+++ b/docs/presentation/ADK_Code_Reviewer_KT_basic_fonts_with_notes.pptx
@@ -1226,8 +1226,8 @@
 2. "show me the diff of src/payments/charge.py": the diff.
 3. "show me the diff of /etc/passwd": refused. This is the point of the phase.
 SHOW: Click the show_diff event card in the chat: its answer is the guardrail's error, not a diff. The tool's own code never ran.
-IF SLOW OR FAILED (about 30 seconds): backup slide b-p3.
-IF ASKED: Every text a model reads is capped (4,000 characters for a diff), and the cut is marked.</a:t>
+SAY: "Every text a model reads is capped, 4,000 characters for a diff, and the cut is marked."
+IF SLOW OR FAILED (about 30 seconds): backup slide b-p3.</a:t>
             </a:r>
             <a:endParaRPr lang="en-US" dirty="0"/>
           </a:p>

--- a/docs/presentation/ADK_Code_Reviewer_KT_basic_fonts_with_notes.pptx
+++ b/docs/presentation/ADK_Code_Reviewer_KT_basic_fonts_with_notes.pptx
@@ -2176,9 +2176,9 @@
               <a:t>SAY: "Going further: phase 7. I won't present it today. Here is where to start."
 SAY: "The same reviewer, in five groups. Each group imports only the groups to its left, and a test checks that."
 DO: Read the six additions quickly, without stopping.
-SAY: "Start with the layering test, then --verify, then --max-tokens, then --profile gates-only."
+SAY: "Start with the layering test, then --verify, then --max-tokens, then --profile gates-only. --list-rules shows every check, and --dry-run shows what a run would cover without running anything."
 NOTE: Without --base, phase 7 asks at the terminal what to review. Answer 1: the change against main.
-IF ASKED: The fallback model is optional: it is used only when REVIEW_FALLBACK_MODEL is set. Phase 7 can also review one folder of a change (--path) or a whole project (--all).</a:t>
+IF ASKED: The fallback model is optional: it is used only when REVIEW_FALLBACK_MODEL is set. Phase 7 can also review one folder of a change (--path) or a whole project (--all). Every untrusted text a lane reads sits between two marker lines carrying a nonce the branch cannot know, and each prompt ends with a reminder.</a:t>
             </a:r>
             <a:endParaRPr lang="en-US" dirty="0"/>
           </a:p>
@@ -2267,7 +2267,7 @@
             <a:r>
               <a:rPr lang="en-US" dirty="0"/>
               <a:t>Self-study. Go through this quickly, and only if there is a minute left.
-SAY: "A rule is one Python class in rules/. Drop the file in, and it checks every line the branch added. A tree rule checks the whole project instead: a file that must exist, a name a module must define, a parent a class must have, a parameter a function must take."
+SAY: "A rule is one Python class in rules/. Drop the file in, and it checks every line the branch added, or one changed file whole, or the whole project: a file that must exist, a name a module must define, a parent a class must have, a parameter a function must take. rules/README.md shows one of each kind, and --check runs one rule alone: no model, no key."
 SAY: "A profile is a named list of checks in config.toml. gates-only names the gates and every rule, and no lane: no model, no key needed, fast enough for every push."
 SAY: "A rule file that will not load, or a broken config, stops the run before it starts, with exit 2. A rule that crashes while it checks is named in the report, and the run exits 3."
 SAY: "Nothing is read from the repository under review. Otherwise a branch could switch off its own secrets check."</a:t>
@@ -2454,7 +2454,7 @@
 IF ASKED about Gemini: put a GOOGLE_API_KEY in .env and set REVIEW_PROVIDER=gemini. Step 2 is then not needed.
 IF ASKED what to try next:
 1. A fourth lane: add one row to LANES in phase_6_reviewer/lanes.py, for example a documentation lane: a name, a role sentence and a thinking budget. The graph, the verdict agent's sections and the report all follow from that table. Review the branch again, and the new lane is in the report.
-2. A rule of your own: one class in phase_7_hardened/rules/. Add its id to gates-only in config.toml, then run phase 7 with --profile gates-only: no model, no key. Without that step the profile does not run the new rule.
+2. A rule of your own: copy phase_7_hardened/rules/_template.py under a new name; rules/README.md says how, with one example of each kind. --check with its id runs it alone: no model, no key. Add its id to gates-only in config.toml when that profile should run it; default runs it already.
 AFTERWARDS:
 1. Stop the recording.
 2. Post the recording, the repository link, the feedback link and the chapter times in the meeting chat.
